--- a/public/downloads/US-114051-L2-Preparing-the-Meeting.pptx
+++ b/public/downloads/US-114051-L2-Preparing-the-Meeting.pptx
@@ -1958,7 +1958,7 @@
                 <a:ea typeface="Aptos" pitchFamily="34" charset="-122"/>
                 <a:cs typeface="Aptos" pitchFamily="34" charset="-120"/>
               </a:rPr>
-              <a:t>Friday, 11 Sep 2026 · 09h00 – 14h00</a:t>
+              <a:t>Friday, 4 Sep 2026 · 09h00 – 14h00</a:t>
             </a:r>
             <a:endParaRPr lang="en-US" sz="1800" dirty="0"/>
           </a:p>
@@ -3843,7 +3843,7 @@
                 <a:ea typeface="Aptos" pitchFamily="34" charset="-122"/>
                 <a:cs typeface="Aptos" pitchFamily="34" charset="-120"/>
               </a:rPr>
-              <a:t>User guides and additional information gathered by the organisation must be readily available to the presenter and participants.</a:t>
+              <a:t>User guides and additional information gathered by the company must be readily available to the presenter and participants.</a:t>
             </a:r>
             <a:endParaRPr lang="en-US" sz="1800" dirty="0"/>
           </a:p>
